--- a/assets/pptx/catalog-637.pptx
+++ b/assets/pptx/catalog-637.pptx
@@ -3259,7 +3259,7 @@
                 <a:ea typeface="Ebrima"/>
                 <a:cs typeface="Ebrima"/>
               </a:rPr>
-              <a:t>ተቀምጦ አለ በሰማይ (2x)</a:t>
+              <a:t>ተቀምጦ አለ በሰማይ 2x</a:t>
             </a:r>
           </a:p>
           <a:p>
@@ -3403,7 +3403,7 @@
                 <a:ea typeface="Ebrima"/>
                 <a:cs typeface="Ebrima"/>
               </a:rPr>
-              <a:t>ሌላ ምን ያሻኛል ለኔ (4x)</a:t>
+              <a:t>ሌላ ምን ያሻኛል ለኔ 4x</a:t>
             </a:r>
           </a:p>
           <a:p>
@@ -3529,7 +3529,7 @@
                 <a:ea typeface="Ebrima"/>
                 <a:cs typeface="Ebrima"/>
               </a:rPr>
-              <a:t>አንተ ካለህ (4x)</a:t>
+              <a:t>አንተ ካለህ 4x</a:t>
             </a:r>
           </a:p>
           <a:p>
@@ -3637,7 +3637,7 @@
                 <a:ea typeface="Ebrima"/>
                 <a:cs typeface="Ebrima"/>
               </a:rPr>
-              <a:t>(4x)</a:t>
+              <a:t>4x</a:t>
             </a:r>
           </a:p>
         </p:txBody>
